--- a/output/education/2026-03-29_availability-bias/availability-bias_slides_residents.pptx
+++ b/output/education/2026-03-29_availability-bias/availability-bias_slides_residents.pptx
@@ -3138,6 +3138,7 @@
               </a:defRPr>
             </a:pPr>
             <a:r>
+              <a:rPr/>
               <a:t>利用可能性バイアスと診断推論</a:t>
             </a:r>
           </a:p>
@@ -3174,6 +3175,7 @@
               </a:defRPr>
             </a:pPr>
             <a:r>
+              <a:rPr/>
               <a:t>— あなたの診断は「記憶」に支配されている？</a:t>
             </a:r>
           </a:p>
@@ -3218,7 +3220,9 @@
           <a:bodyPr rtlCol="0" anchor="ctr"/>
           <a:lstStyle/>
           <a:p>
-            <a:pPr algn="ctr"/>
+            <a:pPr algn="ctr">
+              <a:defRPr/>
+            </a:pPr>
           </a:p>
         </p:txBody>
       </p:sp>
@@ -3231,7 +3235,7 @@
         <p:spPr>
           <a:xfrm>
             <a:off x="457200" y="2377440"/>
-            <a:ext cx="8229600" cy="274320"/>
+            <a:ext cx="8229600" cy="304799"/>
           </a:xfrm>
           <a:prstGeom prst="rect">
             <a:avLst/>
@@ -3253,6 +3257,7 @@
               </a:defRPr>
             </a:pPr>
             <a:r>
+              <a:rPr/>
               <a:t>15分 | 研修医・専攻医向け</a:t>
             </a:r>
           </a:p>
@@ -3297,7 +3302,9 @@
           <a:bodyPr rtlCol="0" anchor="ctr"/>
           <a:lstStyle/>
           <a:p>
-            <a:pPr algn="ctr"/>
+            <a:pPr algn="ctr">
+              <a:defRPr/>
+            </a:pPr>
           </a:p>
         </p:txBody>
       </p:sp>
@@ -3342,7 +3349,9 @@
           <a:bodyPr rtlCol="0" anchor="ctr"/>
           <a:lstStyle/>
           <a:p>
-            <a:pPr algn="ctr"/>
+            <a:pPr algn="ctr">
+              <a:defRPr/>
+            </a:pPr>
           </a:p>
         </p:txBody>
       </p:sp>
@@ -3377,10 +3386,12 @@
               </a:defRPr>
             </a:pPr>
             <a:r>
+              <a:rPr/>
               <a:t>「先週インフルエンザを5人診た翌週、</a:t>
             </a:r>
             <a:br/>
             <a:r>
+              <a:rPr/>
               <a:t>咳と発熱の患者さんが来たら何を考えますか？」</a:t>
             </a:r>
           </a:p>
@@ -3443,6 +3454,7 @@
               </a:defRPr>
             </a:pPr>
             <a:r>
+              <a:rPr/>
               <a:t>利用可能性バイアスへの対策</a:t>
             </a:r>
           </a:p>
@@ -3487,7 +3499,9 @@
           <a:bodyPr rtlCol="0" anchor="ctr"/>
           <a:lstStyle/>
           <a:p>
-            <a:pPr algn="ctr"/>
+            <a:pPr algn="ctr">
+              <a:defRPr/>
+            </a:pPr>
           </a:p>
         </p:txBody>
       </p:sp>
@@ -3530,7 +3544,9 @@
           <a:bodyPr rtlCol="0" anchor="ctr"/>
           <a:lstStyle/>
           <a:p>
-            <a:pPr algn="ctr"/>
+            <a:pPr algn="ctr">
+              <a:defRPr/>
+            </a:pPr>
           </a:p>
         </p:txBody>
       </p:sp>
@@ -3565,6 +3581,7 @@
               </a:defRPr>
             </a:pPr>
             <a:r>
+              <a:rPr/>
               <a:t>個人レベル</a:t>
             </a:r>
           </a:p>
@@ -3601,6 +3618,7 @@
               </a:defRPr>
             </a:pPr>
             <a:r>
+              <a:rPr/>
               <a:t>1. 診断タイムアウト</a:t>
             </a:r>
           </a:p>
@@ -3637,10 +3655,12 @@
               </a:defRPr>
             </a:pPr>
             <a:r>
+              <a:rPr/>
               <a:t>最初の仮説後、10秒間</a:t>
             </a:r>
             <a:br/>
             <a:r>
+              <a:rPr/>
               <a:t>「他の可能性」を考える</a:t>
             </a:r>
           </a:p>
@@ -3677,6 +3697,7 @@
               </a:defRPr>
             </a:pPr>
             <a:r>
+              <a:rPr/>
               <a:t>2. 鑑別リストの外在化</a:t>
             </a:r>
           </a:p>
@@ -3690,7 +3711,7 @@
         </p:nvSpPr>
         <p:spPr>
           <a:xfrm>
-            <a:off x="822960" y="2468879"/>
+            <a:off x="822960" y="2487168"/>
             <a:ext cx="3474720" cy="411480"/>
           </a:xfrm>
           <a:prstGeom prst="rect">
@@ -3713,10 +3734,12 @@
               </a:defRPr>
             </a:pPr>
             <a:r>
+              <a:rPr/>
               <a:t>紙やカルテに3つ以上の</a:t>
             </a:r>
             <a:br/>
             <a:r>
+              <a:rPr/>
               <a:t>鑑別を書き出す</a:t>
             </a:r>
           </a:p>
@@ -3730,7 +3753,7 @@
         </p:nvSpPr>
         <p:spPr>
           <a:xfrm>
-            <a:off x="640080" y="2880360"/>
+            <a:off x="640080" y="2916936"/>
             <a:ext cx="3657600" cy="274320"/>
           </a:xfrm>
           <a:prstGeom prst="rect">
@@ -3753,6 +3776,7 @@
               </a:defRPr>
             </a:pPr>
             <a:r>
+              <a:rPr/>
               <a:t>3. 診断日記</a:t>
             </a:r>
           </a:p>
@@ -3766,7 +3790,7 @@
         </p:nvSpPr>
         <p:spPr>
           <a:xfrm>
-            <a:off x="822960" y="3154679"/>
+            <a:off x="822960" y="3209544"/>
             <a:ext cx="3474720" cy="411480"/>
           </a:xfrm>
           <a:prstGeom prst="rect">
@@ -3789,10 +3813,12 @@
               </a:defRPr>
             </a:pPr>
             <a:r>
+              <a:rPr/>
               <a:t>自分の診断パターンを</a:t>
             </a:r>
             <a:br/>
             <a:r>
+              <a:rPr/>
               <a:t>記録し定期的に振り返る</a:t>
             </a:r>
           </a:p>
@@ -3837,7 +3863,9 @@
           <a:bodyPr rtlCol="0" anchor="ctr"/>
           <a:lstStyle/>
           <a:p>
-            <a:pPr algn="ctr"/>
+            <a:pPr algn="ctr">
+              <a:defRPr/>
+            </a:pPr>
           </a:p>
         </p:txBody>
       </p:sp>
@@ -3872,6 +3900,7 @@
               </a:defRPr>
             </a:pPr>
             <a:r>
+              <a:rPr/>
               <a:t>システムレベル</a:t>
             </a:r>
           </a:p>
@@ -3908,6 +3937,7 @@
               </a:defRPr>
             </a:pPr>
             <a:r>
+              <a:rPr/>
               <a:t>1. 構造化されたカンファレンス</a:t>
             </a:r>
           </a:p>
@@ -3944,10 +3974,12 @@
               </a:defRPr>
             </a:pPr>
             <a:r>
+              <a:rPr/>
               <a:t>診断過程のプロセスを</a:t>
             </a:r>
             <a:br/>
             <a:r>
+              <a:rPr/>
               <a:t>振り返る場の設計</a:t>
             </a:r>
           </a:p>
@@ -3984,6 +4016,7 @@
               </a:defRPr>
             </a:pPr>
             <a:r>
+              <a:rPr/>
               <a:t>2. ピアレビュー</a:t>
             </a:r>
           </a:p>
@@ -3997,7 +4030,7 @@
         </p:nvSpPr>
         <p:spPr>
           <a:xfrm>
-            <a:off x="5120640" y="2468879"/>
+            <a:off x="5120640" y="2487168"/>
             <a:ext cx="3474720" cy="411480"/>
           </a:xfrm>
           <a:prstGeom prst="rect">
@@ -4020,10 +4053,12 @@
               </a:defRPr>
             </a:pPr>
             <a:r>
+              <a:rPr/>
               <a:t>同僚との診断共有と</a:t>
             </a:r>
             <a:br/>
             <a:r>
+              <a:rPr/>
               <a:t>相互フィードバック</a:t>
             </a:r>
           </a:p>
@@ -4037,7 +4072,7 @@
         </p:nvSpPr>
         <p:spPr>
           <a:xfrm>
-            <a:off x="4937760" y="2880360"/>
+            <a:off x="4937760" y="2916936"/>
             <a:ext cx="3657600" cy="274320"/>
           </a:xfrm>
           <a:prstGeom prst="rect">
@@ -4060,6 +4095,7 @@
               </a:defRPr>
             </a:pPr>
             <a:r>
+              <a:rPr/>
               <a:t>3. チェックリスト活用</a:t>
             </a:r>
           </a:p>
@@ -4073,7 +4109,7 @@
         </p:nvSpPr>
         <p:spPr>
           <a:xfrm>
-            <a:off x="5120640" y="3154679"/>
+            <a:off x="5120640" y="3209544"/>
             <a:ext cx="3474720" cy="411480"/>
           </a:xfrm>
           <a:prstGeom prst="rect">
@@ -4096,10 +4132,12 @@
               </a:defRPr>
             </a:pPr>
             <a:r>
+              <a:rPr/>
               <a:t>認知バイアスに対する</a:t>
             </a:r>
             <a:br/>
             <a:r>
+              <a:rPr/>
               <a:t>構造化された防御策</a:t>
             </a:r>
           </a:p>
@@ -4140,7 +4178,7 @@
         <p:spPr>
           <a:xfrm>
             <a:off x="457200" y="274320"/>
-            <a:ext cx="8229600" cy="457200"/>
+            <a:ext cx="8229600" cy="482600"/>
           </a:xfrm>
           <a:prstGeom prst="rect">
             <a:avLst/>
@@ -4162,6 +4200,7 @@
               </a:defRPr>
             </a:pPr>
             <a:r>
+              <a:rPr/>
               <a:t>振り返りと理解度確認</a:t>
             </a:r>
           </a:p>
@@ -4206,7 +4245,9 @@
           <a:bodyPr rtlCol="0" anchor="ctr"/>
           <a:lstStyle/>
           <a:p>
-            <a:pPr algn="ctr"/>
+            <a:pPr algn="ctr">
+              <a:defRPr/>
+            </a:pPr>
           </a:p>
         </p:txBody>
       </p:sp>
@@ -4249,7 +4290,9 @@
           <a:bodyPr rtlCol="0" anchor="ctr"/>
           <a:lstStyle/>
           <a:p>
-            <a:pPr algn="ctr"/>
+            <a:pPr algn="ctr">
+              <a:defRPr/>
+            </a:pPr>
           </a:p>
         </p:txBody>
       </p:sp>
@@ -4284,6 +4327,7 @@
               </a:defRPr>
             </a:pPr>
             <a:r>
+              <a:rPr/>
               <a:t>Q1</a:t>
             </a:r>
           </a:p>
@@ -4330,7 +4374,9 @@
           <a:bodyPr rtlCol="0" anchor="ctr"/>
           <a:lstStyle/>
           <a:p>
-            <a:pPr algn="ctr"/>
+            <a:pPr algn="ctr">
+              <a:defRPr/>
+            </a:pPr>
           </a:p>
         </p:txBody>
       </p:sp>
@@ -4365,6 +4411,7 @@
               </a:defRPr>
             </a:pPr>
             <a:r>
+              <a:rPr/>
               <a:t>利用可能性バイアスの定義を一文で述べてください</a:t>
             </a:r>
           </a:p>
@@ -4409,7 +4456,9 @@
           <a:bodyPr rtlCol="0" anchor="ctr"/>
           <a:lstStyle/>
           <a:p>
-            <a:pPr algn="ctr"/>
+            <a:pPr algn="ctr">
+              <a:defRPr/>
+            </a:pPr>
           </a:p>
         </p:txBody>
       </p:sp>
@@ -4444,6 +4493,7 @@
               </a:defRPr>
             </a:pPr>
             <a:r>
+              <a:rPr/>
               <a:t>Q2</a:t>
             </a:r>
           </a:p>
@@ -4490,7 +4540,9 @@
           <a:bodyPr rtlCol="0" anchor="ctr"/>
           <a:lstStyle/>
           <a:p>
-            <a:pPr algn="ctr"/>
+            <a:pPr algn="ctr">
+              <a:defRPr/>
+            </a:pPr>
           </a:p>
         </p:txBody>
       </p:sp>
@@ -4525,6 +4577,7 @@
               </a:defRPr>
             </a:pPr>
             <a:r>
+              <a:rPr/>
               <a:t>この研究で、経験年数は誤診率の軽減に有意だったか？</a:t>
             </a:r>
           </a:p>
@@ -4569,7 +4622,9 @@
           <a:bodyPr rtlCol="0" anchor="ctr"/>
           <a:lstStyle/>
           <a:p>
-            <a:pPr algn="ctr"/>
+            <a:pPr algn="ctr">
+              <a:defRPr/>
+            </a:pPr>
           </a:p>
         </p:txBody>
       </p:sp>
@@ -4604,6 +4659,7 @@
               </a:defRPr>
             </a:pPr>
             <a:r>
+              <a:rPr/>
               <a:t>Q3</a:t>
             </a:r>
           </a:p>
@@ -4650,7 +4706,9 @@
           <a:bodyPr rtlCol="0" anchor="ctr"/>
           <a:lstStyle/>
           <a:p>
-            <a:pPr algn="ctr"/>
+            <a:pPr algn="ctr">
+              <a:defRPr/>
+            </a:pPr>
           </a:p>
         </p:txBody>
       </p:sp>
@@ -4685,6 +4743,7 @@
               </a:defRPr>
             </a:pPr>
             <a:r>
+              <a:rPr/>
               <a:t>経験年数ではなく何が重要だと結論されたか？</a:t>
             </a:r>
           </a:p>
@@ -4725,7 +4784,7 @@
         <p:spPr>
           <a:xfrm>
             <a:off x="457200" y="274320"/>
-            <a:ext cx="8229600" cy="457200"/>
+            <a:ext cx="8229600" cy="482600"/>
           </a:xfrm>
           <a:prstGeom prst="rect">
             <a:avLst/>
@@ -4747,6 +4806,7 @@
               </a:defRPr>
             </a:pPr>
             <a:r>
+              <a:rPr/>
               <a:t>持ち帰りの問い — 明日の臨床から</a:t>
             </a:r>
           </a:p>
@@ -4791,7 +4851,9 @@
           <a:bodyPr rtlCol="0" anchor="ctr"/>
           <a:lstStyle/>
           <a:p>
-            <a:pPr algn="ctr"/>
+            <a:pPr algn="ctr">
+              <a:defRPr/>
+            </a:pPr>
           </a:p>
         </p:txBody>
       </p:sp>
@@ -4834,7 +4896,9 @@
           <a:bodyPr rtlCol="0" anchor="ctr"/>
           <a:lstStyle/>
           <a:p>
-            <a:pPr algn="ctr"/>
+            <a:pPr algn="ctr">
+              <a:defRPr/>
+            </a:pPr>
           </a:p>
         </p:txBody>
       </p:sp>
@@ -4879,7 +4943,9 @@
           <a:bodyPr rtlCol="0" anchor="ctr"/>
           <a:lstStyle/>
           <a:p>
-            <a:pPr algn="ctr"/>
+            <a:pPr algn="ctr">
+              <a:defRPr/>
+            </a:pPr>
           </a:p>
         </p:txBody>
       </p:sp>
@@ -4914,18 +4980,22 @@
               </a:defRPr>
             </a:pPr>
             <a:r>
+              <a:rPr/>
               <a:t>今週1つだけ試すなら:</a:t>
             </a:r>
             <a:br/>
             <a:r>
+              <a:rPr/>
               <a:t>外来で最初の診断仮説を立てた直後に、</a:t>
             </a:r>
             <a:br/>
             <a:r>
+              <a:rPr/>
               <a:t>「本当にそうか？先週の経験に</a:t>
             </a:r>
             <a:br/>
             <a:r>
+              <a:rPr/>
               <a:t>引きずられていないか？」と自問する10秒間を作る</a:t>
             </a:r>
           </a:p>
@@ -4940,7 +5010,7 @@
         <p:spPr>
           <a:xfrm>
             <a:off x="731520" y="2743200"/>
-            <a:ext cx="7315200" cy="274320"/>
+            <a:ext cx="7315200" cy="340360"/>
           </a:xfrm>
           <a:prstGeom prst="rect">
             <a:avLst/>
@@ -4962,6 +5032,7 @@
               </a:defRPr>
             </a:pPr>
             <a:r>
+              <a:rPr/>
               <a:t>さらに深めたい人へ:</a:t>
             </a:r>
           </a:p>
@@ -4998,6 +5069,7 @@
               </a:defRPr>
             </a:pPr>
             <a:r>
+              <a:rPr/>
               <a:t>  Croskerry P. (2009) Academic Medicine — 診断推論の普遍的モデル</a:t>
             </a:r>
           </a:p>
@@ -5034,6 +5106,7 @@
               </a:defRPr>
             </a:pPr>
             <a:r>
+              <a:rPr/>
               <a:t>  Kahneman D. (2011) Thinking, Fast and Slow（ファスト&amp;スロー）</a:t>
             </a:r>
           </a:p>
@@ -5070,6 +5143,7 @@
               </a:defRPr>
             </a:pPr>
             <a:r>
+              <a:rPr/>
               <a:t>  Moura EC et al. (2026) BMJ Quality &amp; Safety</a:t>
             </a:r>
           </a:p>
@@ -5106,6 +5180,7 @@
               </a:defRPr>
             </a:pPr>
             <a:r>
+              <a:rPr/>
               <a:t>  AJM (2025) Over-investigation and cognitive bias</a:t>
             </a:r>
           </a:p>
@@ -5146,7 +5221,7 @@
         <p:spPr>
           <a:xfrm>
             <a:off x="457200" y="274320"/>
-            <a:ext cx="8229600" cy="457200"/>
+            <a:ext cx="8229600" cy="482600"/>
           </a:xfrm>
           <a:prstGeom prst="rect">
             <a:avLst/>
@@ -5168,6 +5243,7 @@
               </a:defRPr>
             </a:pPr>
             <a:r>
+              <a:rPr/>
               <a:t>学習目標</a:t>
             </a:r>
           </a:p>
@@ -5212,7 +5288,9 @@
           <a:bodyPr rtlCol="0" anchor="ctr"/>
           <a:lstStyle/>
           <a:p>
-            <a:pPr algn="ctr"/>
+            <a:pPr algn="ctr">
+              <a:defRPr/>
+            </a:pPr>
           </a:p>
         </p:txBody>
       </p:sp>
@@ -5255,7 +5333,9 @@
           <a:bodyPr rtlCol="0" anchor="ctr"/>
           <a:lstStyle/>
           <a:p>
-            <a:pPr algn="ctr"/>
+            <a:pPr algn="ctr">
+              <a:defRPr/>
+            </a:pPr>
           </a:p>
         </p:txBody>
       </p:sp>
@@ -5290,6 +5370,7 @@
               </a:defRPr>
             </a:pPr>
             <a:r>
+              <a:rPr/>
               <a:t>1</a:t>
             </a:r>
           </a:p>
@@ -5326,6 +5407,7 @@
               </a:defRPr>
             </a:pPr>
             <a:r>
+              <a:rPr/>
               <a:t>説明できる</a:t>
             </a:r>
           </a:p>
@@ -5362,10 +5444,12 @@
               </a:defRPr>
             </a:pPr>
             <a:r>
+              <a:rPr/>
               <a:t>利用可能性バイアスの定義と</a:t>
             </a:r>
             <a:br/>
             <a:r>
+              <a:rPr/>
               <a:t>発生メカニズムを自分の言葉で説明できる</a:t>
             </a:r>
           </a:p>
@@ -5410,7 +5494,9 @@
           <a:bodyPr rtlCol="0" anchor="ctr"/>
           <a:lstStyle/>
           <a:p>
-            <a:pPr algn="ctr"/>
+            <a:pPr algn="ctr">
+              <a:defRPr/>
+            </a:pPr>
           </a:p>
         </p:txBody>
       </p:sp>
@@ -5445,6 +5531,7 @@
               </a:defRPr>
             </a:pPr>
             <a:r>
+              <a:rPr/>
               <a:t>2</a:t>
             </a:r>
           </a:p>
@@ -5481,6 +5568,7 @@
               </a:defRPr>
             </a:pPr>
             <a:r>
+              <a:rPr/>
               <a:t>批判的に吟味できる</a:t>
             </a:r>
           </a:p>
@@ -5517,10 +5605,12 @@
               </a:defRPr>
             </a:pPr>
             <a:r>
+              <a:rPr/>
               <a:t>Moura et al. (2026) の研究デザイン・</a:t>
             </a:r>
             <a:br/>
             <a:r>
+              <a:rPr/>
               <a:t>結果・限界を分析できる</a:t>
             </a:r>
           </a:p>
@@ -5565,7 +5655,9 @@
           <a:bodyPr rtlCol="0" anchor="ctr"/>
           <a:lstStyle/>
           <a:p>
-            <a:pPr algn="ctr"/>
+            <a:pPr algn="ctr">
+              <a:defRPr/>
+            </a:pPr>
           </a:p>
         </p:txBody>
       </p:sp>
@@ -5600,6 +5692,7 @@
               </a:defRPr>
             </a:pPr>
             <a:r>
+              <a:rPr/>
               <a:t>3</a:t>
             </a:r>
           </a:p>
@@ -5636,6 +5729,7 @@
               </a:defRPr>
             </a:pPr>
             <a:r>
+              <a:rPr/>
               <a:t>計画を立てられる</a:t>
             </a:r>
           </a:p>
@@ -5672,10 +5766,12 @@
               </a:defRPr>
             </a:pPr>
             <a:r>
+              <a:rPr/>
               <a:t>自身の臨床推論でバイアスを軽減する</a:t>
             </a:r>
             <a:br/>
             <a:r>
+              <a:rPr/>
               <a:t>構造化された振り返りを設計できる</a:t>
             </a:r>
           </a:p>
@@ -5738,6 +5834,7 @@
               </a:defRPr>
             </a:pPr>
             <a:r>
+              <a:rPr/>
               <a:t>認知バイアスの復習 — System 1 と System 2</a:t>
             </a:r>
           </a:p>
@@ -5782,7 +5879,9 @@
           <a:bodyPr rtlCol="0" anchor="ctr"/>
           <a:lstStyle/>
           <a:p>
-            <a:pPr algn="ctr"/>
+            <a:pPr algn="ctr">
+              <a:defRPr/>
+            </a:pPr>
           </a:p>
         </p:txBody>
       </p:sp>
@@ -5827,7 +5926,9 @@
           <a:bodyPr rtlCol="0" anchor="ctr"/>
           <a:lstStyle/>
           <a:p>
-            <a:pPr algn="ctr"/>
+            <a:pPr algn="ctr">
+              <a:defRPr/>
+            </a:pPr>
           </a:p>
         </p:txBody>
       </p:sp>
@@ -5862,6 +5963,7 @@
               </a:defRPr>
             </a:pPr>
             <a:r>
+              <a:rPr/>
               <a:t>System 1（速い思考）</a:t>
             </a:r>
           </a:p>
@@ -5898,10 +6000,12 @@
               </a:defRPr>
             </a:pPr>
             <a:r>
+              <a:rPr/>
               <a:t>直感的・自動的・省エネ</a:t>
             </a:r>
             <a:br/>
             <a:r>
+              <a:rPr/>
               <a:t>臨床のほとんどの判断</a:t>
             </a:r>
           </a:p>
@@ -5948,7 +6052,9 @@
           <a:bodyPr rtlCol="0" anchor="ctr"/>
           <a:lstStyle/>
           <a:p>
-            <a:pPr algn="ctr"/>
+            <a:pPr algn="ctr">
+              <a:defRPr/>
+            </a:pPr>
           </a:p>
         </p:txBody>
       </p:sp>
@@ -5983,6 +6089,7 @@
               </a:defRPr>
             </a:pPr>
             <a:r>
+              <a:rPr/>
               <a:t>System 2（遅い思考）</a:t>
             </a:r>
           </a:p>
@@ -6019,10 +6126,12 @@
               </a:defRPr>
             </a:pPr>
             <a:r>
+              <a:rPr/>
               <a:t>分析的・意識的・高負荷</a:t>
             </a:r>
             <a:br/>
             <a:r>
+              <a:rPr/>
               <a:t>複雑な鑑別診断</a:t>
             </a:r>
           </a:p>
@@ -6059,6 +6168,7 @@
               </a:defRPr>
             </a:pPr>
             <a:r>
+              <a:rPr/>
               <a:t>認知バイアスはSystem 1のショートカット（ヒューリスティクス）から生じる</a:t>
             </a:r>
           </a:p>
@@ -6095,6 +6205,7 @@
               </a:defRPr>
             </a:pPr>
             <a:r>
+              <a:rPr/>
               <a:t>  利用可能性バイアス: 思い出しやすい情報を過大評価</a:t>
             </a:r>
           </a:p>
@@ -6131,6 +6242,7 @@
               </a:defRPr>
             </a:pPr>
             <a:r>
+              <a:rPr/>
               <a:t>  アンカリング: 最初の情報に固執する</a:t>
             </a:r>
           </a:p>
@@ -6167,6 +6279,7 @@
               </a:defRPr>
             </a:pPr>
             <a:r>
+              <a:rPr/>
               <a:t>  確証バイアス: 自分の仮説を支持する情報ばかり集める</a:t>
             </a:r>
           </a:p>
@@ -6207,7 +6320,7 @@
         <p:spPr>
           <a:xfrm>
             <a:off x="457200" y="274320"/>
-            <a:ext cx="8229600" cy="457200"/>
+            <a:ext cx="8229600" cy="482600"/>
           </a:xfrm>
           <a:prstGeom prst="rect">
             <a:avLst/>
@@ -6229,6 +6342,7 @@
               </a:defRPr>
             </a:pPr>
             <a:r>
+              <a:rPr/>
               <a:t>利用可能性バイアスとは何か</a:t>
             </a:r>
           </a:p>
@@ -6273,7 +6387,9 @@
           <a:bodyPr rtlCol="0" anchor="ctr"/>
           <a:lstStyle/>
           <a:p>
-            <a:pPr algn="ctr"/>
+            <a:pPr algn="ctr">
+              <a:defRPr/>
+            </a:pPr>
           </a:p>
         </p:txBody>
       </p:sp>
@@ -6316,7 +6432,9 @@
           <a:bodyPr rtlCol="0" anchor="ctr"/>
           <a:lstStyle/>
           <a:p>
-            <a:pPr algn="ctr"/>
+            <a:pPr algn="ctr">
+              <a:defRPr/>
+            </a:pPr>
           </a:p>
         </p:txBody>
       </p:sp>
@@ -6361,7 +6479,9 @@
           <a:bodyPr rtlCol="0" anchor="ctr"/>
           <a:lstStyle/>
           <a:p>
-            <a:pPr algn="ctr"/>
+            <a:pPr algn="ctr">
+              <a:defRPr/>
+            </a:pPr>
           </a:p>
         </p:txBody>
       </p:sp>
@@ -6396,10 +6516,12 @@
               </a:defRPr>
             </a:pPr>
             <a:r>
+              <a:rPr/>
               <a:t>記憶から容易に想起できる情報を、</a:t>
             </a:r>
             <a:br/>
             <a:r>
+              <a:rPr/>
               <a:t>実際の頻度や確率よりも重要視する認知傾向</a:t>
             </a:r>
           </a:p>
@@ -6414,7 +6536,7 @@
         <p:spPr>
           <a:xfrm>
             <a:off x="731520" y="2011680"/>
-            <a:ext cx="7315200" cy="274320"/>
+            <a:ext cx="7315200" cy="287020"/>
           </a:xfrm>
           <a:prstGeom prst="rect">
             <a:avLst/>
@@ -6436,6 +6558,7 @@
               </a:defRPr>
             </a:pPr>
             <a:r>
+              <a:rPr/>
               <a:t>Tversky &amp; Kahneman (1973) が最初に記述</a:t>
             </a:r>
           </a:p>
@@ -6450,7 +6573,7 @@
         <p:spPr>
           <a:xfrm>
             <a:off x="731520" y="2468880"/>
-            <a:ext cx="7315200" cy="274320"/>
+            <a:ext cx="7315200" cy="340360"/>
           </a:xfrm>
           <a:prstGeom prst="rect">
             <a:avLst/>
@@ -6472,6 +6595,7 @@
               </a:defRPr>
             </a:pPr>
             <a:r>
+              <a:rPr/>
               <a:t>臨床場面での発動条件:</a:t>
             </a:r>
           </a:p>
@@ -6508,6 +6632,7 @@
               </a:defRPr>
             </a:pPr>
             <a:r>
+              <a:rPr/>
               <a:t>  直近の経験</a:t>
             </a:r>
           </a:p>
@@ -6544,6 +6669,7 @@
               </a:defRPr>
             </a:pPr>
             <a:r>
+              <a:rPr/>
               <a:t>先週同じ疾患を診た</a:t>
             </a:r>
           </a:p>
@@ -6580,6 +6706,7 @@
               </a:defRPr>
             </a:pPr>
             <a:r>
+              <a:rPr/>
               <a:t>  感情的インパクト</a:t>
             </a:r>
           </a:p>
@@ -6616,6 +6743,7 @@
               </a:defRPr>
             </a:pPr>
             <a:r>
+              <a:rPr/>
               <a:t>印象に残った重症例</a:t>
             </a:r>
           </a:p>
@@ -6652,6 +6780,7 @@
               </a:defRPr>
             </a:pPr>
             <a:r>
+              <a:rPr/>
               <a:t>  メディア露出</a:t>
             </a:r>
           </a:p>
@@ -6688,6 +6817,7 @@
               </a:defRPr>
             </a:pPr>
             <a:r>
+              <a:rPr/>
               <a:t>ニュースで話題の疾患</a:t>
             </a:r>
           </a:p>
@@ -6732,7 +6862,9 @@
           <a:bodyPr rtlCol="0" anchor="ctr"/>
           <a:lstStyle/>
           <a:p>
-            <a:pPr algn="ctr"/>
+            <a:pPr algn="ctr">
+              <a:defRPr/>
+            </a:pPr>
           </a:p>
         </p:txBody>
       </p:sp>
@@ -6777,7 +6909,9 @@
           <a:bodyPr rtlCol="0" anchor="ctr"/>
           <a:lstStyle/>
           <a:p>
-            <a:pPr algn="ctr"/>
+            <a:pPr algn="ctr">
+              <a:defRPr/>
+            </a:pPr>
           </a:p>
         </p:txBody>
       </p:sp>
@@ -6812,6 +6946,7 @@
               </a:defRPr>
             </a:pPr>
             <a:r>
+              <a:rPr/>
               <a:t>例: インフルエンザ流行期に連続で診断した後、同じ症状の市中肺炎を見逃す</a:t>
             </a:r>
           </a:p>
@@ -6852,7 +6987,7 @@
         <p:spPr>
           <a:xfrm>
             <a:off x="457200" y="274320"/>
-            <a:ext cx="8229600" cy="457200"/>
+            <a:ext cx="8229600" cy="482600"/>
           </a:xfrm>
           <a:prstGeom prst="rect">
             <a:avLst/>
@@ -6874,6 +7009,7 @@
               </a:defRPr>
             </a:pPr>
             <a:r>
+              <a:rPr/>
               <a:t>研究紹介 — Moura et al. (2026)</a:t>
             </a:r>
           </a:p>
@@ -6918,7 +7054,9 @@
           <a:bodyPr rtlCol="0" anchor="ctr"/>
           <a:lstStyle/>
           <a:p>
-            <a:pPr algn="ctr"/>
+            <a:pPr algn="ctr">
+              <a:defRPr/>
+            </a:pPr>
           </a:p>
         </p:txBody>
       </p:sp>
@@ -6953,6 +7091,7 @@
               </a:defRPr>
             </a:pPr>
             <a:r>
+              <a:rPr/>
               <a:t>BMJ Quality &amp; Safety (2026年2月)</a:t>
             </a:r>
           </a:p>
@@ -6966,7 +7105,7 @@
         </p:nvSpPr>
         <p:spPr>
           <a:xfrm>
-            <a:off x="457200" y="1280160"/>
+            <a:off x="457200" y="1298448"/>
             <a:ext cx="8229600" cy="274320"/>
           </a:xfrm>
           <a:prstGeom prst="rect">
@@ -6989,6 +7128,7 @@
               </a:defRPr>
             </a:pPr>
             <a:r>
+              <a:rPr/>
               <a:t>DOI: 10.1136/bmjqs-2025-019520</a:t>
             </a:r>
           </a:p>
@@ -7033,7 +7173,9 @@
           <a:bodyPr rtlCol="0" anchor="ctr"/>
           <a:lstStyle/>
           <a:p>
-            <a:pPr algn="ctr"/>
+            <a:pPr algn="ctr">
+              <a:defRPr/>
+            </a:pPr>
           </a:p>
         </p:txBody>
       </p:sp>
@@ -7068,6 +7210,7 @@
               </a:defRPr>
             </a:pPr>
             <a:r>
+              <a:rPr/>
               <a:t>デザイン</a:t>
             </a:r>
           </a:p>
@@ -7104,6 +7247,7 @@
               </a:defRPr>
             </a:pPr>
             <a:r>
+              <a:rPr/>
               <a:t>横断調査（Cross-sectional study）</a:t>
             </a:r>
           </a:p>
@@ -7148,7 +7292,9 @@
           <a:bodyPr rtlCol="0" anchor="ctr"/>
           <a:lstStyle/>
           <a:p>
-            <a:pPr algn="ctr"/>
+            <a:pPr algn="ctr">
+              <a:defRPr/>
+            </a:pPr>
           </a:p>
         </p:txBody>
       </p:sp>
@@ -7183,6 +7329,7 @@
               </a:defRPr>
             </a:pPr>
             <a:r>
+              <a:rPr/>
               <a:t>対象</a:t>
             </a:r>
           </a:p>
@@ -7219,6 +7366,7 @@
               </a:defRPr>
             </a:pPr>
             <a:r>
+              <a:rPr/>
               <a:t>1015名の医師（複数の専門科・経験年数）</a:t>
             </a:r>
           </a:p>
@@ -7263,7 +7411,9 @@
           <a:bodyPr rtlCol="0" anchor="ctr"/>
           <a:lstStyle/>
           <a:p>
-            <a:pPr algn="ctr"/>
+            <a:pPr algn="ctr">
+              <a:defRPr/>
+            </a:pPr>
           </a:p>
         </p:txBody>
       </p:sp>
@@ -7298,6 +7448,7 @@
               </a:defRPr>
             </a:pPr>
             <a:r>
+              <a:rPr/>
               <a:t>方法</a:t>
             </a:r>
           </a:p>
@@ -7334,6 +7485,7 @@
               </a:defRPr>
             </a:pPr>
             <a:r>
+              <a:rPr/>
               <a:t>臨床ビネット（仮想症例）を用いた診断課題</a:t>
             </a:r>
           </a:p>
@@ -7378,7 +7530,9 @@
           <a:bodyPr rtlCol="0" anchor="ctr"/>
           <a:lstStyle/>
           <a:p>
-            <a:pPr algn="ctr"/>
+            <a:pPr algn="ctr">
+              <a:defRPr/>
+            </a:pPr>
           </a:p>
         </p:txBody>
       </p:sp>
@@ -7413,6 +7567,7 @@
               </a:defRPr>
             </a:pPr>
             <a:r>
+              <a:rPr/>
               <a:t>主要曝露</a:t>
             </a:r>
           </a:p>
@@ -7449,6 +7604,7 @@
               </a:defRPr>
             </a:pPr>
             <a:r>
+              <a:rPr/>
               <a:t>直近7日以内に特定疾患の患者を診察した経験の有無</a:t>
             </a:r>
           </a:p>
@@ -7493,7 +7649,9 @@
           <a:bodyPr rtlCol="0" anchor="ctr"/>
           <a:lstStyle/>
           <a:p>
-            <a:pPr algn="ctr"/>
+            <a:pPr algn="ctr">
+              <a:defRPr/>
+            </a:pPr>
           </a:p>
         </p:txBody>
       </p:sp>
@@ -7528,6 +7686,7 @@
               </a:defRPr>
             </a:pPr>
             <a:r>
+              <a:rPr/>
               <a:t>主要アウトカム</a:t>
             </a:r>
           </a:p>
@@ -7564,6 +7723,7 @@
               </a:defRPr>
             </a:pPr>
             <a:r>
+              <a:rPr/>
               <a:t>誤診率</a:t>
             </a:r>
           </a:p>
@@ -7604,7 +7764,7 @@
         <p:spPr>
           <a:xfrm>
             <a:off x="457200" y="274320"/>
-            <a:ext cx="8229600" cy="457200"/>
+            <a:ext cx="8229600" cy="482600"/>
           </a:xfrm>
           <a:prstGeom prst="rect">
             <a:avLst/>
@@ -7626,6 +7786,7 @@
               </a:defRPr>
             </a:pPr>
             <a:r>
+              <a:rPr/>
               <a:t>主要結果</a:t>
             </a:r>
           </a:p>
@@ -7670,7 +7831,9 @@
           <a:bodyPr rtlCol="0" anchor="ctr"/>
           <a:lstStyle/>
           <a:p>
-            <a:pPr algn="ctr"/>
+            <a:pPr algn="ctr">
+              <a:defRPr/>
+            </a:pPr>
           </a:p>
         </p:txBody>
       </p:sp>
@@ -8036,7 +8199,9 @@
           <a:bodyPr rtlCol="0" anchor="ctr"/>
           <a:lstStyle/>
           <a:p>
-            <a:pPr algn="ctr"/>
+            <a:pPr algn="ctr">
+              <a:defRPr/>
+            </a:pPr>
           </a:p>
         </p:txBody>
       </p:sp>
@@ -8071,6 +8236,7 @@
               </a:defRPr>
             </a:pPr>
             <a:r>
+              <a:rPr/>
               <a:t>核心的メッセージ</a:t>
             </a:r>
           </a:p>
@@ -8107,6 +8273,7 @@
               </a:defRPr>
             </a:pPr>
             <a:r>
+              <a:rPr/>
               <a:t>「たくさん診ている」こと自体はバイアス軽減にならない</a:t>
             </a:r>
           </a:p>
@@ -8143,6 +8310,7 @@
               </a:defRPr>
             </a:pPr>
             <a:r>
+              <a:rPr/>
               <a:t>重要なのは「構造化された経験」と「フィードバック」の蓄積</a:t>
             </a:r>
           </a:p>
@@ -8205,6 +8373,7 @@
               </a:defRPr>
             </a:pPr>
             <a:r>
+              <a:rPr/>
               <a:t>批判的吟味 — この研究の強みと限界</a:t>
             </a:r>
           </a:p>
@@ -8249,7 +8418,9 @@
           <a:bodyPr rtlCol="0" anchor="ctr"/>
           <a:lstStyle/>
           <a:p>
-            <a:pPr algn="ctr"/>
+            <a:pPr algn="ctr">
+              <a:defRPr/>
+            </a:pPr>
           </a:p>
         </p:txBody>
       </p:sp>
@@ -8294,7 +8465,9 @@
           <a:bodyPr rtlCol="0" anchor="ctr"/>
           <a:lstStyle/>
           <a:p>
-            <a:pPr algn="ctr"/>
+            <a:pPr algn="ctr">
+              <a:defRPr/>
+            </a:pPr>
           </a:p>
         </p:txBody>
       </p:sp>
@@ -8307,7 +8480,7 @@
         <p:spPr>
           <a:xfrm>
             <a:off x="548640" y="1188720"/>
-            <a:ext cx="3657600" cy="365760"/>
+            <a:ext cx="3657600" cy="375920"/>
           </a:xfrm>
           <a:prstGeom prst="rect">
             <a:avLst/>
@@ -8329,6 +8502,7 @@
               </a:defRPr>
             </a:pPr>
             <a:r>
+              <a:rPr/>
               <a:t>強み</a:t>
             </a:r>
           </a:p>
@@ -8365,6 +8539,7 @@
               </a:defRPr>
             </a:pPr>
             <a:r>
+              <a:rPr/>
               <a:t>  大規模サンプル（n=1015）</a:t>
             </a:r>
           </a:p>
@@ -8401,6 +8576,7 @@
               </a:defRPr>
             </a:pPr>
             <a:r>
+              <a:rPr/>
               <a:t>  実際の臨床経験を曝露変数として使用</a:t>
             </a:r>
           </a:p>
@@ -8437,6 +8613,7 @@
               </a:defRPr>
             </a:pPr>
             <a:r>
+              <a:rPr/>
               <a:t>  複数の専門科を横断的に調査</a:t>
             </a:r>
           </a:p>
@@ -8483,7 +8660,9 @@
           <a:bodyPr rtlCol="0" anchor="ctr"/>
           <a:lstStyle/>
           <a:p>
-            <a:pPr algn="ctr"/>
+            <a:pPr algn="ctr">
+              <a:defRPr/>
+            </a:pPr>
           </a:p>
         </p:txBody>
       </p:sp>
@@ -8496,7 +8675,7 @@
         <p:spPr>
           <a:xfrm>
             <a:off x="4846320" y="1188720"/>
-            <a:ext cx="3657600" cy="365760"/>
+            <a:ext cx="3657600" cy="375920"/>
           </a:xfrm>
           <a:prstGeom prst="rect">
             <a:avLst/>
@@ -8518,6 +8697,7 @@
               </a:defRPr>
             </a:pPr>
             <a:r>
+              <a:rPr/>
               <a:t>限界</a:t>
             </a:r>
           </a:p>
@@ -8554,6 +8734,7 @@
               </a:defRPr>
             </a:pPr>
             <a:r>
+              <a:rPr/>
               <a:t>  横断研究のため因果関係は断定不可</a:t>
             </a:r>
           </a:p>
@@ -8590,6 +8771,7 @@
               </a:defRPr>
             </a:pPr>
             <a:r>
+              <a:rPr/>
               <a:t>  臨床ビネットは実臨床の複雑性を再現しない</a:t>
             </a:r>
           </a:p>
@@ -8626,6 +8808,7 @@
               </a:defRPr>
             </a:pPr>
             <a:r>
+              <a:rPr/>
               <a:t>  自己申告ベース（想起バイアス）</a:t>
             </a:r>
           </a:p>
@@ -8662,6 +8845,7 @@
               </a:defRPr>
             </a:pPr>
             <a:r>
+              <a:rPr/>
               <a:t>  「構造化された経験」の定義が曖昧</a:t>
             </a:r>
           </a:p>
@@ -8698,6 +8882,7 @@
               </a:defRPr>
             </a:pPr>
             <a:r>
+              <a:rPr/>
               <a:t>関連: AJM (2025) — 認知バイアスが過剰検査につながるメカニズムも報告</a:t>
             </a:r>
           </a:p>
@@ -8738,7 +8923,7 @@
         <p:spPr>
           <a:xfrm>
             <a:off x="457200" y="274320"/>
-            <a:ext cx="8229600" cy="457200"/>
+            <a:ext cx="8229600" cy="482600"/>
           </a:xfrm>
           <a:prstGeom prst="rect">
             <a:avLst/>
@@ -8760,6 +8945,7 @@
               </a:defRPr>
             </a:pPr>
             <a:r>
+              <a:rPr/>
               <a:t>ペアディスカッション（4分間）</a:t>
             </a:r>
           </a:p>
@@ -8804,7 +8990,9 @@
           <a:bodyPr rtlCol="0" anchor="ctr"/>
           <a:lstStyle/>
           <a:p>
-            <a:pPr algn="ctr"/>
+            <a:pPr algn="ctr">
+              <a:defRPr/>
+            </a:pPr>
           </a:p>
         </p:txBody>
       </p:sp>
@@ -8847,7 +9035,9 @@
           <a:bodyPr rtlCol="0" anchor="ctr"/>
           <a:lstStyle/>
           <a:p>
-            <a:pPr algn="ctr"/>
+            <a:pPr algn="ctr">
+              <a:defRPr/>
+            </a:pPr>
           </a:p>
         </p:txBody>
       </p:sp>
@@ -8892,7 +9082,9 @@
           <a:bodyPr rtlCol="0" anchor="ctr"/>
           <a:lstStyle/>
           <a:p>
-            <a:pPr algn="ctr"/>
+            <a:pPr algn="ctr">
+              <a:defRPr/>
+            </a:pPr>
           </a:p>
         </p:txBody>
       </p:sp>
@@ -8927,14 +9119,17 @@
               </a:defRPr>
             </a:pPr>
             <a:r>
+              <a:rPr/>
               <a:t>問い1: 「自分が直近の経験に引きずられて</a:t>
             </a:r>
             <a:br/>
             <a:r>
+              <a:rPr/>
               <a:t>診断を変えた（または変えそうになった）</a:t>
             </a:r>
             <a:br/>
             <a:r>
+              <a:rPr/>
               <a:t>エピソードはありますか？」</a:t>
             </a:r>
           </a:p>
@@ -8979,7 +9174,9 @@
           <a:bodyPr rtlCol="0" anchor="ctr"/>
           <a:lstStyle/>
           <a:p>
-            <a:pPr algn="ctr"/>
+            <a:pPr algn="ctr">
+              <a:defRPr/>
+            </a:pPr>
           </a:p>
         </p:txBody>
       </p:sp>
@@ -9024,7 +9221,9 @@
           <a:bodyPr rtlCol="0" anchor="ctr"/>
           <a:lstStyle/>
           <a:p>
-            <a:pPr algn="ctr"/>
+            <a:pPr algn="ctr">
+              <a:defRPr/>
+            </a:pPr>
           </a:p>
         </p:txBody>
       </p:sp>
@@ -9059,10 +9258,12 @@
               </a:defRPr>
             </a:pPr>
             <a:r>
+              <a:rPr/>
               <a:t>問い2: 「その時、何がきっかけで</a:t>
             </a:r>
             <a:br/>
             <a:r>
+              <a:rPr/>
               <a:t>気づけた（または気づけなかった）のか？」</a:t>
             </a:r>
           </a:p>
@@ -9099,6 +9300,7 @@
               </a:defRPr>
             </a:pPr>
             <a:r>
+              <a:rPr/>
               <a:t>1人2分ずつ / 具体的な症例でなくても「あのとき危なかった」レベルでOK</a:t>
             </a:r>
           </a:p>
@@ -9139,7 +9341,7 @@
         <p:spPr>
           <a:xfrm>
             <a:off x="457200" y="274320"/>
-            <a:ext cx="8229600" cy="457200"/>
+            <a:ext cx="8229600" cy="482600"/>
           </a:xfrm>
           <a:prstGeom prst="rect">
             <a:avLst/>
@@ -9161,6 +9363,7 @@
               </a:defRPr>
             </a:pPr>
             <a:r>
+              <a:rPr/>
               <a:t>共有とフィードバック</a:t>
             </a:r>
           </a:p>
@@ -9205,7 +9408,9 @@
           <a:bodyPr rtlCol="0" anchor="ctr"/>
           <a:lstStyle/>
           <a:p>
-            <a:pPr algn="ctr"/>
+            <a:pPr algn="ctr">
+              <a:defRPr/>
+            </a:pPr>
           </a:p>
         </p:txBody>
       </p:sp>
@@ -9218,7 +9423,7 @@
         <p:spPr>
           <a:xfrm>
             <a:off x="457200" y="1005840"/>
-            <a:ext cx="8229600" cy="274320"/>
+            <a:ext cx="8229600" cy="340360"/>
           </a:xfrm>
           <a:prstGeom prst="rect">
             <a:avLst/>
@@ -9240,6 +9445,7 @@
               </a:defRPr>
             </a:pPr>
             <a:r>
+              <a:rPr/>
               <a:t>全体共有（2-3名から）:</a:t>
             </a:r>
           </a:p>
@@ -9276,6 +9482,7 @@
               </a:defRPr>
             </a:pPr>
             <a:r>
+              <a:rPr/>
               <a:t>  どんな場面で利用可能性バイアスが発動しやすいと感じた？</a:t>
             </a:r>
           </a:p>
@@ -9312,6 +9519,7 @@
               </a:defRPr>
             </a:pPr>
             <a:r>
+              <a:rPr/>
               <a:t>  「気づけた」要因は何だった？</a:t>
             </a:r>
           </a:p>
@@ -9326,7 +9534,7 @@
         <p:spPr>
           <a:xfrm>
             <a:off x="457200" y="2377440"/>
-            <a:ext cx="8229600" cy="274320"/>
+            <a:ext cx="8229600" cy="340360"/>
           </a:xfrm>
           <a:prstGeom prst="rect">
             <a:avLst/>
@@ -9348,6 +9556,7 @@
               </a:defRPr>
             </a:pPr>
             <a:r>
+              <a:rPr/>
               <a:t>ファシリテーターからの補足ポイント:</a:t>
             </a:r>
           </a:p>
@@ -9394,7 +9603,9 @@
           <a:bodyPr rtlCol="0" anchor="ctr"/>
           <a:lstStyle/>
           <a:p>
-            <a:pPr algn="ctr"/>
+            <a:pPr algn="ctr">
+              <a:defRPr/>
+            </a:pPr>
           </a:p>
         </p:txBody>
       </p:sp>
@@ -9429,6 +9640,7 @@
               </a:defRPr>
             </a:pPr>
             <a:r>
+              <a:rPr/>
               <a:t>  「忙しい時ほどSystem 1に頼りがち」</a:t>
             </a:r>
           </a:p>
@@ -9475,7 +9687,9 @@
           <a:bodyPr rtlCol="0" anchor="ctr"/>
           <a:lstStyle/>
           <a:p>
-            <a:pPr algn="ctr"/>
+            <a:pPr algn="ctr">
+              <a:defRPr/>
+            </a:pPr>
           </a:p>
         </p:txBody>
       </p:sp>
@@ -9510,6 +9724,7 @@
               </a:defRPr>
             </a:pPr>
             <a:r>
+              <a:rPr/>
               <a:t>  「一人で診断を完結させる場面」が最もリスクが高い</a:t>
             </a:r>
           </a:p>
@@ -9556,7 +9771,9 @@
           <a:bodyPr rtlCol="0" anchor="ctr"/>
           <a:lstStyle/>
           <a:p>
-            <a:pPr algn="ctr"/>
+            <a:pPr algn="ctr">
+              <a:defRPr/>
+            </a:pPr>
           </a:p>
         </p:txBody>
       </p:sp>
@@ -9591,6 +9808,7 @@
               </a:defRPr>
             </a:pPr>
             <a:r>
+              <a:rPr/>
               <a:t>  フィードバックなしの経験は「バイアスの強化練習」になりうる</a:t>
             </a:r>
           </a:p>
